--- a/content/docs/theory-analysis/nvidia-gpu-sharing/images/images.pptx
+++ b/content/docs/theory-analysis/nvidia-gpu-sharing/images/images.pptx
@@ -239,7 +239,7 @@
           <a:p>
             <a:fld id="{6CD5550B-26C4-49A9-A5BA-636EF7BE6CE9}" type="datetimeFigureOut">
               <a:rPr lang="ko-KR" altLang="en-US" smtClean="0"/>
-              <a:t>2026. 2. 22.</a:t>
+              <a:t>2026. 3. 23.</a:t>
             </a:fld>
             <a:endParaRPr lang="ko-KR" altLang="en-US"/>
           </a:p>
@@ -937,7 +937,7 @@
           <a:p>
             <a:fld id="{FB30EDBD-1C2D-4C1E-B459-B60219FAB484}" type="datetimeFigureOut">
               <a:rPr lang="ko-KR" altLang="en-US" smtClean="0"/>
-              <a:t>2026. 2. 22.</a:t>
+              <a:t>2026. 3. 23.</a:t>
             </a:fld>
             <a:endParaRPr lang="ko-KR" altLang="en-US"/>
           </a:p>
@@ -1100,7 +1100,7 @@
           <a:p>
             <a:fld id="{FB30EDBD-1C2D-4C1E-B459-B60219FAB484}" type="datetimeFigureOut">
               <a:rPr lang="ko-KR" altLang="en-US" smtClean="0"/>
-              <a:t>2026. 2. 22.</a:t>
+              <a:t>2026. 3. 23.</a:t>
             </a:fld>
             <a:endParaRPr lang="ko-KR" altLang="en-US"/>
           </a:p>
@@ -1273,7 +1273,7 @@
           <a:p>
             <a:fld id="{FB30EDBD-1C2D-4C1E-B459-B60219FAB484}" type="datetimeFigureOut">
               <a:rPr lang="ko-KR" altLang="en-US" smtClean="0"/>
-              <a:t>2026. 2. 22.</a:t>
+              <a:t>2026. 3. 23.</a:t>
             </a:fld>
             <a:endParaRPr lang="ko-KR" altLang="en-US"/>
           </a:p>
@@ -1436,7 +1436,7 @@
           <a:p>
             <a:fld id="{FB30EDBD-1C2D-4C1E-B459-B60219FAB484}" type="datetimeFigureOut">
               <a:rPr lang="ko-KR" altLang="en-US" smtClean="0"/>
-              <a:t>2026. 2. 22.</a:t>
+              <a:t>2026. 3. 23.</a:t>
             </a:fld>
             <a:endParaRPr lang="ko-KR" altLang="en-US"/>
           </a:p>
@@ -1676,7 +1676,7 @@
           <a:p>
             <a:fld id="{FB30EDBD-1C2D-4C1E-B459-B60219FAB484}" type="datetimeFigureOut">
               <a:rPr lang="ko-KR" altLang="en-US" smtClean="0"/>
-              <a:t>2026. 2. 22.</a:t>
+              <a:t>2026. 3. 23.</a:t>
             </a:fld>
             <a:endParaRPr lang="ko-KR" altLang="en-US"/>
           </a:p>
@@ -1956,7 +1956,7 @@
           <a:p>
             <a:fld id="{FB30EDBD-1C2D-4C1E-B459-B60219FAB484}" type="datetimeFigureOut">
               <a:rPr lang="ko-KR" altLang="en-US" smtClean="0"/>
-              <a:t>2026. 2. 22.</a:t>
+              <a:t>2026. 3. 23.</a:t>
             </a:fld>
             <a:endParaRPr lang="ko-KR" altLang="en-US"/>
           </a:p>
@@ -2370,7 +2370,7 @@
           <a:p>
             <a:fld id="{FB30EDBD-1C2D-4C1E-B459-B60219FAB484}" type="datetimeFigureOut">
               <a:rPr lang="ko-KR" altLang="en-US" smtClean="0"/>
-              <a:t>2026. 2. 22.</a:t>
+              <a:t>2026. 3. 23.</a:t>
             </a:fld>
             <a:endParaRPr lang="ko-KR" altLang="en-US"/>
           </a:p>
@@ -2482,7 +2482,7 @@
           <a:p>
             <a:fld id="{FB30EDBD-1C2D-4C1E-B459-B60219FAB484}" type="datetimeFigureOut">
               <a:rPr lang="ko-KR" altLang="en-US" smtClean="0"/>
-              <a:t>2026. 2. 22.</a:t>
+              <a:t>2026. 3. 23.</a:t>
             </a:fld>
             <a:endParaRPr lang="ko-KR" altLang="en-US"/>
           </a:p>
@@ -2572,7 +2572,7 @@
           <a:p>
             <a:fld id="{FB30EDBD-1C2D-4C1E-B459-B60219FAB484}" type="datetimeFigureOut">
               <a:rPr lang="ko-KR" altLang="en-US" smtClean="0"/>
-              <a:t>2026. 2. 22.</a:t>
+              <a:t>2026. 3. 23.</a:t>
             </a:fld>
             <a:endParaRPr lang="ko-KR" altLang="en-US"/>
           </a:p>
@@ -2842,7 +2842,7 @@
           <a:p>
             <a:fld id="{FB30EDBD-1C2D-4C1E-B459-B60219FAB484}" type="datetimeFigureOut">
               <a:rPr lang="ko-KR" altLang="en-US" smtClean="0"/>
-              <a:t>2026. 2. 22.</a:t>
+              <a:t>2026. 3. 23.</a:t>
             </a:fld>
             <a:endParaRPr lang="ko-KR" altLang="en-US"/>
           </a:p>
@@ -3089,7 +3089,7 @@
           <a:p>
             <a:fld id="{FB30EDBD-1C2D-4C1E-B459-B60219FAB484}" type="datetimeFigureOut">
               <a:rPr lang="ko-KR" altLang="en-US" smtClean="0"/>
-              <a:t>2026. 2. 22.</a:t>
+              <a:t>2026. 3. 23.</a:t>
             </a:fld>
             <a:endParaRPr lang="ko-KR" altLang="en-US"/>
           </a:p>
@@ -3295,7 +3295,7 @@
           <a:p>
             <a:fld id="{FB30EDBD-1C2D-4C1E-B459-B60219FAB484}" type="datetimeFigureOut">
               <a:rPr lang="ko-KR" altLang="en-US" smtClean="0"/>
-              <a:t>2026. 2. 22.</a:t>
+              <a:t>2026. 3. 23.</a:t>
             </a:fld>
             <a:endParaRPr lang="ko-KR" altLang="en-US"/>
           </a:p>
@@ -25736,12 +25736,20 @@
           <a:p>
             <a:pPr algn="ctr"/>
             <a:r>
+              <a:rPr kumimoji="1" lang="en-US" altLang="ko-KR" sz="900" b="1" u="sng">
+                <a:solidFill>
+                  <a:schemeClr val="tx1"/>
+                </a:solidFill>
+              </a:rPr>
+              <a:t>GPU Context</a:t>
+            </a:r>
+            <a:r>
               <a:rPr kumimoji="1" lang="en-US" altLang="ko-KR" sz="900">
                 <a:solidFill>
                   <a:schemeClr val="tx1"/>
                 </a:solidFill>
               </a:rPr>
-              <a:t>GPU Context, </a:t>
+              <a:t>, </a:t>
             </a:r>
             <a:br>
               <a:rPr kumimoji="1" lang="en-US" altLang="ko-KR" sz="900">
@@ -25902,12 +25910,20 @@
           <a:p>
             <a:pPr algn="ctr"/>
             <a:r>
+              <a:rPr kumimoji="1" lang="en-US" altLang="ko-KR" sz="900" b="1" u="sng">
+                <a:solidFill>
+                  <a:schemeClr val="tx1"/>
+                </a:solidFill>
+              </a:rPr>
+              <a:t>GPU Context</a:t>
+            </a:r>
+            <a:r>
               <a:rPr kumimoji="1" lang="en-US" altLang="ko-KR" sz="900">
                 <a:solidFill>
                   <a:schemeClr val="tx1"/>
                 </a:solidFill>
               </a:rPr>
-              <a:t>GPU Context, </a:t>
+              <a:t>, </a:t>
             </a:r>
             <a:br>
               <a:rPr kumimoji="1" lang="en-US" altLang="ko-KR" sz="900">
@@ -25998,12 +26014,20 @@
           <a:p>
             <a:pPr algn="ctr"/>
             <a:r>
+              <a:rPr kumimoji="1" lang="en-US" altLang="ko-KR" sz="900" b="1" u="sng">
+                <a:solidFill>
+                  <a:schemeClr val="tx1"/>
+                </a:solidFill>
+              </a:rPr>
+              <a:t>GPU Context</a:t>
+            </a:r>
+            <a:r>
               <a:rPr kumimoji="1" lang="en-US" altLang="ko-KR" sz="900">
                 <a:solidFill>
                   <a:schemeClr val="tx1"/>
                 </a:solidFill>
               </a:rPr>
-              <a:t>GPU Context, </a:t>
+              <a:t>, </a:t>
             </a:r>
             <a:br>
               <a:rPr kumimoji="1" lang="en-US" altLang="ko-KR" sz="900">
@@ -26261,7 +26285,23 @@
                   <a:schemeClr val="tx1"/>
                 </a:solidFill>
               </a:rPr>
-              <a:t> Memory </a:t>
+              <a:t> Memory</a:t>
+            </a:r>
+            <a:r>
+              <a:rPr kumimoji="1" lang="ko-KR" altLang="en-US" sz="900">
+                <a:solidFill>
+                  <a:schemeClr val="tx1"/>
+                </a:solidFill>
+              </a:rPr>
+              <a:t> </a:t>
+            </a:r>
+            <a:r>
+              <a:rPr kumimoji="1" lang="en-US" altLang="ko-KR" sz="900">
+                <a:solidFill>
+                  <a:schemeClr val="tx1"/>
+                </a:solidFill>
+              </a:rPr>
+              <a:t> </a:t>
             </a:r>
             <a:endParaRPr kumimoji="1" lang="ko-KR" altLang="en-US" sz="900">
               <a:solidFill>
